--- a/poster/PS2-FP04-A0-Poster.pptx
+++ b/poster/PS2-FP04-A0-Poster.pptx
@@ -5205,11 +5205,11 @@
             <a:r>
               <a:rPr sz="1520" b="0">
                 <a:solidFill>
-                  <a:srgbClr val="C00000"/>
-                </a:solidFill>
-                <a:latin typeface="Calibri"/>
-              </a:rPr>
-              <a:t>Commit 【填：最终 commit】</a:t>
+                  <a:srgbClr val="212A33"/>
+                </a:solidFill>
+                <a:latin typeface="Calibri"/>
+              </a:rPr>
+              <a:t>Commit 383092e</a:t>
             </a:r>
             <a:r>
               <a:rPr sz="1520" b="0">
